--- a/ゲーム科1年/00_前期/ゲームプログラミングⅢ/ゲーム数学/座学/10_三角関数.pptx
+++ b/ゲーム科1年/00_前期/ゲームプログラミングⅢ/ゲーム数学/座学/10_三角関数.pptx
@@ -266,7 +266,7 @@
           <a:p>
             <a:fld id="{E9CC885B-4903-4D54-9A93-00025F12DED9}" type="datetimeFigureOut">
               <a:rPr kumimoji="1" lang="ja-JP" altLang="en-US" smtClean="0"/>
-              <a:t>2024/10/9</a:t>
+              <a:t>2025/6/24</a:t>
             </a:fld>
             <a:endParaRPr kumimoji="1" lang="ja-JP" altLang="en-US"/>
           </a:p>
@@ -496,7 +496,7 @@
           <a:p>
             <a:fld id="{E9CC885B-4903-4D54-9A93-00025F12DED9}" type="datetimeFigureOut">
               <a:rPr kumimoji="1" lang="ja-JP" altLang="en-US" smtClean="0"/>
-              <a:t>2024/10/9</a:t>
+              <a:t>2025/6/24</a:t>
             </a:fld>
             <a:endParaRPr kumimoji="1" lang="ja-JP" altLang="en-US"/>
           </a:p>
@@ -736,7 +736,7 @@
           <a:p>
             <a:fld id="{E9CC885B-4903-4D54-9A93-00025F12DED9}" type="datetimeFigureOut">
               <a:rPr kumimoji="1" lang="ja-JP" altLang="en-US" smtClean="0"/>
-              <a:t>2024/10/9</a:t>
+              <a:t>2025/6/24</a:t>
             </a:fld>
             <a:endParaRPr kumimoji="1" lang="ja-JP" altLang="en-US"/>
           </a:p>
@@ -966,7 +966,7 @@
           <a:p>
             <a:fld id="{E9CC885B-4903-4D54-9A93-00025F12DED9}" type="datetimeFigureOut">
               <a:rPr kumimoji="1" lang="ja-JP" altLang="en-US" smtClean="0"/>
-              <a:t>2024/10/9</a:t>
+              <a:t>2025/6/24</a:t>
             </a:fld>
             <a:endParaRPr kumimoji="1" lang="ja-JP" altLang="en-US"/>
           </a:p>
@@ -1241,7 +1241,7 @@
           <a:p>
             <a:fld id="{E9CC885B-4903-4D54-9A93-00025F12DED9}" type="datetimeFigureOut">
               <a:rPr kumimoji="1" lang="ja-JP" altLang="en-US" smtClean="0"/>
-              <a:t>2024/10/9</a:t>
+              <a:t>2025/6/24</a:t>
             </a:fld>
             <a:endParaRPr kumimoji="1" lang="ja-JP" altLang="en-US"/>
           </a:p>
@@ -1570,7 +1570,7 @@
           <a:p>
             <a:fld id="{E9CC885B-4903-4D54-9A93-00025F12DED9}" type="datetimeFigureOut">
               <a:rPr kumimoji="1" lang="ja-JP" altLang="en-US" smtClean="0"/>
-              <a:t>2024/10/9</a:t>
+              <a:t>2025/6/24</a:t>
             </a:fld>
             <a:endParaRPr kumimoji="1" lang="ja-JP" altLang="en-US"/>
           </a:p>
@@ -2046,7 +2046,7 @@
           <a:p>
             <a:fld id="{E9CC885B-4903-4D54-9A93-00025F12DED9}" type="datetimeFigureOut">
               <a:rPr kumimoji="1" lang="ja-JP" altLang="en-US" smtClean="0"/>
-              <a:t>2024/10/9</a:t>
+              <a:t>2025/6/24</a:t>
             </a:fld>
             <a:endParaRPr kumimoji="1" lang="ja-JP" altLang="en-US"/>
           </a:p>
@@ -2187,7 +2187,7 @@
           <a:p>
             <a:fld id="{E9CC885B-4903-4D54-9A93-00025F12DED9}" type="datetimeFigureOut">
               <a:rPr kumimoji="1" lang="ja-JP" altLang="en-US" smtClean="0"/>
-              <a:t>2024/10/9</a:t>
+              <a:t>2025/6/24</a:t>
             </a:fld>
             <a:endParaRPr kumimoji="1" lang="ja-JP" altLang="en-US"/>
           </a:p>
@@ -2300,7 +2300,7 @@
           <a:p>
             <a:fld id="{E9CC885B-4903-4D54-9A93-00025F12DED9}" type="datetimeFigureOut">
               <a:rPr kumimoji="1" lang="ja-JP" altLang="en-US" smtClean="0"/>
-              <a:t>2024/10/9</a:t>
+              <a:t>2025/6/24</a:t>
             </a:fld>
             <a:endParaRPr kumimoji="1" lang="ja-JP" altLang="en-US"/>
           </a:p>
@@ -2643,7 +2643,7 @@
           <a:p>
             <a:fld id="{E9CC885B-4903-4D54-9A93-00025F12DED9}" type="datetimeFigureOut">
               <a:rPr kumimoji="1" lang="ja-JP" altLang="en-US" smtClean="0"/>
-              <a:t>2024/10/9</a:t>
+              <a:t>2025/6/24</a:t>
             </a:fld>
             <a:endParaRPr kumimoji="1" lang="ja-JP" altLang="en-US"/>
           </a:p>
@@ -2931,7 +2931,7 @@
           <a:p>
             <a:fld id="{E9CC885B-4903-4D54-9A93-00025F12DED9}" type="datetimeFigureOut">
               <a:rPr kumimoji="1" lang="ja-JP" altLang="en-US" smtClean="0"/>
-              <a:t>2024/10/9</a:t>
+              <a:t>2025/6/24</a:t>
             </a:fld>
             <a:endParaRPr kumimoji="1" lang="ja-JP" altLang="en-US"/>
           </a:p>
@@ -3204,7 +3204,7 @@
           <a:p>
             <a:fld id="{E9CC885B-4903-4D54-9A93-00025F12DED9}" type="datetimeFigureOut">
               <a:rPr kumimoji="1" lang="ja-JP" altLang="en-US" smtClean="0"/>
-              <a:t>2024/10/9</a:t>
+              <a:t>2025/6/24</a:t>
             </a:fld>
             <a:endParaRPr kumimoji="1" lang="ja-JP" altLang="en-US"/>
           </a:p>
@@ -4364,6 +4364,60 @@
           <a:chExt cx="0" cy="0"/>
         </a:xfrm>
       </p:grpSpPr>
+      <p:sp>
+        <p:nvSpPr>
+          <p:cNvPr id="2" name="四角形: 角を丸くする 1">
+            <a:extLst>
+              <a:ext uri="{FF2B5EF4-FFF2-40B4-BE49-F238E27FC236}">
+                <a16:creationId xmlns:a16="http://schemas.microsoft.com/office/drawing/2014/main" id="{B369BB1C-95CF-4E61-BEB1-44C99C83EAFE}"/>
+              </a:ext>
+            </a:extLst>
+          </p:cNvPr>
+          <p:cNvSpPr/>
+          <p:nvPr/>
+        </p:nvSpPr>
+        <p:spPr>
+          <a:xfrm>
+            <a:off x="225614" y="2531533"/>
+            <a:ext cx="11009653" cy="3591940"/>
+          </a:xfrm>
+          <a:prstGeom prst="roundRect">
+            <a:avLst/>
+          </a:prstGeom>
+          <a:solidFill>
+            <a:schemeClr val="bg1">
+              <a:lumMod val="85000"/>
+            </a:schemeClr>
+          </a:solidFill>
+          <a:ln>
+            <a:noFill/>
+          </a:ln>
+        </p:spPr>
+        <p:style>
+          <a:lnRef idx="2">
+            <a:schemeClr val="accent1">
+              <a:shade val="50000"/>
+            </a:schemeClr>
+          </a:lnRef>
+          <a:fillRef idx="1">
+            <a:schemeClr val="accent1"/>
+          </a:fillRef>
+          <a:effectRef idx="0">
+            <a:schemeClr val="accent1"/>
+          </a:effectRef>
+          <a:fontRef idx="minor">
+            <a:schemeClr val="lt1"/>
+          </a:fontRef>
+        </p:style>
+        <p:txBody>
+          <a:bodyPr rtlCol="0" anchor="ctr"/>
+          <a:lstStyle/>
+          <a:p>
+            <a:pPr algn="ctr"/>
+            <a:endParaRPr kumimoji="1" lang="ja-JP" altLang="en-US"/>
+          </a:p>
+        </p:txBody>
+      </p:sp>
       <p:sp>
         <p:nvSpPr>
           <p:cNvPr id="4" name="テキスト ボックス 3">
@@ -6558,6 +6612,60 @@
           <a:chExt cx="0" cy="0"/>
         </a:xfrm>
       </p:grpSpPr>
+      <p:sp>
+        <p:nvSpPr>
+          <p:cNvPr id="5" name="四角形: 角を丸くする 4">
+            <a:extLst>
+              <a:ext uri="{FF2B5EF4-FFF2-40B4-BE49-F238E27FC236}">
+                <a16:creationId xmlns:a16="http://schemas.microsoft.com/office/drawing/2014/main" id="{2553B3A3-BCE9-4CD4-8C74-DDD79F662ACF}"/>
+              </a:ext>
+            </a:extLst>
+          </p:cNvPr>
+          <p:cNvSpPr/>
+          <p:nvPr/>
+        </p:nvSpPr>
+        <p:spPr>
+          <a:xfrm>
+            <a:off x="206958" y="1761066"/>
+            <a:ext cx="11009653" cy="2760133"/>
+          </a:xfrm>
+          <a:prstGeom prst="roundRect">
+            <a:avLst/>
+          </a:prstGeom>
+          <a:solidFill>
+            <a:schemeClr val="bg1">
+              <a:lumMod val="85000"/>
+            </a:schemeClr>
+          </a:solidFill>
+          <a:ln>
+            <a:noFill/>
+          </a:ln>
+        </p:spPr>
+        <p:style>
+          <a:lnRef idx="2">
+            <a:schemeClr val="accent1">
+              <a:shade val="50000"/>
+            </a:schemeClr>
+          </a:lnRef>
+          <a:fillRef idx="1">
+            <a:schemeClr val="accent1"/>
+          </a:fillRef>
+          <a:effectRef idx="0">
+            <a:schemeClr val="accent1"/>
+          </a:effectRef>
+          <a:fontRef idx="minor">
+            <a:schemeClr val="lt1"/>
+          </a:fontRef>
+        </p:style>
+        <p:txBody>
+          <a:bodyPr rtlCol="0" anchor="ctr"/>
+          <a:lstStyle/>
+          <a:p>
+            <a:pPr algn="ctr"/>
+            <a:endParaRPr kumimoji="1" lang="ja-JP" altLang="en-US"/>
+          </a:p>
+        </p:txBody>
+      </p:sp>
       <p:sp>
         <p:nvSpPr>
           <p:cNvPr id="4" name="テキスト ボックス 3">
@@ -9349,8 +9457,8 @@
           </a:p>
         </p:txBody>
       </p:sp>
-      <mc:AlternateContent xmlns:mc="http://schemas.openxmlformats.org/markup-compatibility/2006">
-        <mc:Choice xmlns:a14="http://schemas.microsoft.com/office/drawing/2010/main" Requires="a14">
+      <mc:AlternateContent xmlns:mc="http://schemas.openxmlformats.org/markup-compatibility/2006" xmlns:a14="http://schemas.microsoft.com/office/drawing/2010/main">
+        <mc:Choice Requires="a14">
           <p:sp>
             <p:nvSpPr>
               <p:cNvPr id="6" name="テキスト ボックス 5">
@@ -9651,7 +9759,7 @@
             </p:txBody>
           </p:sp>
         </mc:Choice>
-        <mc:Fallback>
+        <mc:Fallback xmlns="">
           <p:sp>
             <p:nvSpPr>
               <p:cNvPr id="6" name="テキスト ボックス 5">
@@ -10012,8 +10120,8 @@
               </p:style>
             </p:cxnSp>
           </p:grpSp>
-          <mc:AlternateContent xmlns:mc="http://schemas.openxmlformats.org/markup-compatibility/2006">
-            <mc:Choice xmlns:a14="http://schemas.microsoft.com/office/drawing/2010/main" Requires="a14">
+          <mc:AlternateContent xmlns:mc="http://schemas.openxmlformats.org/markup-compatibility/2006" xmlns:a14="http://schemas.microsoft.com/office/drawing/2010/main">
+            <mc:Choice Requires="a14">
               <p:sp>
                 <p:nvSpPr>
                   <p:cNvPr id="8" name="テキスト ボックス 7">
@@ -10063,7 +10171,7 @@
                 </p:txBody>
               </p:sp>
             </mc:Choice>
-            <mc:Fallback>
+            <mc:Fallback xmlns="">
               <p:sp>
                 <p:nvSpPr>
                   <p:cNvPr id="8" name="テキスト ボックス 7">
@@ -10108,8 +10216,8 @@
               </p:sp>
             </mc:Fallback>
           </mc:AlternateContent>
-          <mc:AlternateContent xmlns:mc="http://schemas.openxmlformats.org/markup-compatibility/2006">
-            <mc:Choice xmlns:a14="http://schemas.microsoft.com/office/drawing/2010/main" Requires="a14">
+          <mc:AlternateContent xmlns:mc="http://schemas.openxmlformats.org/markup-compatibility/2006" xmlns:a14="http://schemas.microsoft.com/office/drawing/2010/main">
+            <mc:Choice Requires="a14">
               <p:sp>
                 <p:nvSpPr>
                   <p:cNvPr id="9" name="テキスト ボックス 8">
@@ -10159,7 +10267,7 @@
                 </p:txBody>
               </p:sp>
             </mc:Choice>
-            <mc:Fallback>
+            <mc:Fallback xmlns="">
               <p:sp>
                 <p:nvSpPr>
                   <p:cNvPr id="9" name="テキスト ボックス 8">
@@ -10257,8 +10365,8 @@
             </p:txBody>
           </p:sp>
         </p:grpSp>
-        <mc:AlternateContent xmlns:mc="http://schemas.openxmlformats.org/markup-compatibility/2006">
-          <mc:Choice xmlns:a14="http://schemas.microsoft.com/office/drawing/2010/main" Requires="a14">
+        <mc:AlternateContent xmlns:mc="http://schemas.openxmlformats.org/markup-compatibility/2006" xmlns:a14="http://schemas.microsoft.com/office/drawing/2010/main">
+          <mc:Choice Requires="a14">
             <p:sp>
               <p:nvSpPr>
                 <p:cNvPr id="16" name="テキスト ボックス 15">
@@ -10311,7 +10419,7 @@
               </p:txBody>
             </p:sp>
           </mc:Choice>
-          <mc:Fallback>
+          <mc:Fallback xmlns="">
             <p:sp>
               <p:nvSpPr>
                 <p:cNvPr id="16" name="テキスト ボックス 15">
@@ -10357,8 +10465,8 @@
           </mc:Fallback>
         </mc:AlternateContent>
       </p:grpSp>
-      <mc:AlternateContent xmlns:mc="http://schemas.openxmlformats.org/markup-compatibility/2006">
-        <mc:Choice xmlns:a14="http://schemas.microsoft.com/office/drawing/2010/main" Requires="a14">
+      <mc:AlternateContent xmlns:mc="http://schemas.openxmlformats.org/markup-compatibility/2006" xmlns:a14="http://schemas.microsoft.com/office/drawing/2010/main">
+        <mc:Choice Requires="a14">
           <p:sp>
             <p:nvSpPr>
               <p:cNvPr id="17" name="テキスト ボックス 16">
@@ -10611,7 +10719,7 @@
             </p:txBody>
           </p:sp>
         </mc:Choice>
-        <mc:Fallback>
+        <mc:Fallback xmlns="">
           <p:sp>
             <p:nvSpPr>
               <p:cNvPr id="17" name="テキスト ボックス 16">
